--- a/outdoor_seld_e2e/md/seminar/図_検証_通知層_2026-08-20.pptx
+++ b/outdoor_seld_e2e/md/seminar/図_検証_通知層_2026-08-20.pptx
@@ -4614,7 +4614,536 @@
       </p:sp>
       <p:sp>
         <p:nvSpPr>
-          <p:cNvPr id="33" name="TextBox 32"/>
+          <p:cNvPr id="33" name="Rectangle 32"/>
+          <p:cNvSpPr/>
+          <p:nvPr/>
+        </p:nvSpPr>
+        <p:spPr>
+          <a:xfrm>
+            <a:off x="685800" y="5308600"/>
+            <a:ext cx="7569200" cy="787400"/>
+          </a:xfrm>
+          <a:prstGeom prst="rect">
+            <a:avLst/>
+          </a:prstGeom>
+          <a:solidFill>
+            <a:srgbClr val="FFFFFF"/>
+          </a:solidFill>
+          <a:ln w="12700">
+            <a:solidFill>
+              <a:srgbClr val="D9DAD2"/>
+            </a:solidFill>
+          </a:ln>
+          <a:effectLst/>
+        </p:spPr>
+        <p:style>
+          <a:lnRef idx="1">
+            <a:schemeClr val="accent1"/>
+          </a:lnRef>
+          <a:fillRef idx="3">
+            <a:schemeClr val="accent1"/>
+          </a:fillRef>
+          <a:effectRef idx="2">
+            <a:schemeClr val="accent1"/>
+          </a:effectRef>
+          <a:fontRef idx="minor">
+            <a:schemeClr val="lt1"/>
+          </a:fontRef>
+        </p:style>
+        <p:txBody>
+          <a:bodyPr rtlCol="0" anchor="t" wrap="square" lIns="127000" rIns="127000" tIns="101600" bIns="101600"/>
+          <a:lstStyle/>
+          <a:p>
+            <a:pPr algn="ctr"/>
+          </a:p>
+        </p:txBody>
+      </p:sp>
+      <p:cxnSp>
+        <p:nvCxnSpPr>
+          <p:cNvPr id="34" name="Connector 33"/>
+          <p:cNvCxnSpPr/>
+          <p:nvPr/>
+        </p:nvCxnSpPr>
+        <p:spPr>
+          <a:xfrm>
+            <a:off x="2260600" y="5765800"/>
+            <a:ext cx="5511800" cy="0"/>
+          </a:xfrm>
+          <a:prstGeom prst="line">
+            <a:avLst/>
+          </a:prstGeom>
+          <a:ln w="19050">
+            <a:solidFill>
+              <a:srgbClr val="16233A"/>
+            </a:solidFill>
+          </a:ln>
+          <a:effectLst/>
+        </p:spPr>
+        <p:style>
+          <a:lnRef idx="2">
+            <a:schemeClr val="accent1"/>
+          </a:lnRef>
+          <a:fillRef idx="0">
+            <a:schemeClr val="accent1"/>
+          </a:fillRef>
+          <a:effectRef idx="1">
+            <a:schemeClr val="accent1"/>
+          </a:effectRef>
+          <a:fontRef idx="minor">
+            <a:schemeClr val="tx1"/>
+          </a:fontRef>
+        </p:style>
+      </p:cxnSp>
+      <p:cxnSp>
+        <p:nvCxnSpPr>
+          <p:cNvPr id="35" name="Connector 34"/>
+          <p:cNvCxnSpPr/>
+          <p:nvPr/>
+        </p:nvCxnSpPr>
+        <p:spPr>
+          <a:xfrm>
+            <a:off x="2260600" y="5715000"/>
+            <a:ext cx="0" cy="101600"/>
+          </a:xfrm>
+          <a:prstGeom prst="line">
+            <a:avLst/>
+          </a:prstGeom>
+          <a:ln w="12700">
+            <a:solidFill>
+              <a:srgbClr val="66707F"/>
+            </a:solidFill>
+          </a:ln>
+          <a:effectLst/>
+        </p:spPr>
+        <p:style>
+          <a:lnRef idx="2">
+            <a:schemeClr val="accent1"/>
+          </a:lnRef>
+          <a:fillRef idx="0">
+            <a:schemeClr val="accent1"/>
+          </a:fillRef>
+          <a:effectRef idx="1">
+            <a:schemeClr val="accent1"/>
+          </a:effectRef>
+          <a:fontRef idx="minor">
+            <a:schemeClr val="tx1"/>
+          </a:fontRef>
+        </p:style>
+      </p:cxnSp>
+      <p:cxnSp>
+        <p:nvCxnSpPr>
+          <p:cNvPr id="36" name="Connector 35"/>
+          <p:cNvCxnSpPr/>
+          <p:nvPr/>
+        </p:nvCxnSpPr>
+        <p:spPr>
+          <a:xfrm>
+            <a:off x="4097866" y="5715000"/>
+            <a:ext cx="0" cy="101600"/>
+          </a:xfrm>
+          <a:prstGeom prst="line">
+            <a:avLst/>
+          </a:prstGeom>
+          <a:ln w="12700">
+            <a:solidFill>
+              <a:srgbClr val="66707F"/>
+            </a:solidFill>
+          </a:ln>
+          <a:effectLst/>
+        </p:spPr>
+        <p:style>
+          <a:lnRef idx="2">
+            <a:schemeClr val="accent1"/>
+          </a:lnRef>
+          <a:fillRef idx="0">
+            <a:schemeClr val="accent1"/>
+          </a:fillRef>
+          <a:effectRef idx="1">
+            <a:schemeClr val="accent1"/>
+          </a:effectRef>
+          <a:fontRef idx="minor">
+            <a:schemeClr val="tx1"/>
+          </a:fontRef>
+        </p:style>
+      </p:cxnSp>
+      <p:cxnSp>
+        <p:nvCxnSpPr>
+          <p:cNvPr id="37" name="Connector 36"/>
+          <p:cNvCxnSpPr/>
+          <p:nvPr/>
+        </p:nvCxnSpPr>
+        <p:spPr>
+          <a:xfrm>
+            <a:off x="5935133" y="5715000"/>
+            <a:ext cx="0" cy="101600"/>
+          </a:xfrm>
+          <a:prstGeom prst="line">
+            <a:avLst/>
+          </a:prstGeom>
+          <a:ln w="12700">
+            <a:solidFill>
+              <a:srgbClr val="66707F"/>
+            </a:solidFill>
+          </a:ln>
+          <a:effectLst/>
+        </p:spPr>
+        <p:style>
+          <a:lnRef idx="2">
+            <a:schemeClr val="accent1"/>
+          </a:lnRef>
+          <a:fillRef idx="0">
+            <a:schemeClr val="accent1"/>
+          </a:fillRef>
+          <a:effectRef idx="1">
+            <a:schemeClr val="accent1"/>
+          </a:effectRef>
+          <a:fontRef idx="minor">
+            <a:schemeClr val="tx1"/>
+          </a:fontRef>
+        </p:style>
+      </p:cxnSp>
+      <p:cxnSp>
+        <p:nvCxnSpPr>
+          <p:cNvPr id="38" name="Connector 37"/>
+          <p:cNvCxnSpPr/>
+          <p:nvPr/>
+        </p:nvCxnSpPr>
+        <p:spPr>
+          <a:xfrm>
+            <a:off x="7772400" y="5715000"/>
+            <a:ext cx="0" cy="101600"/>
+          </a:xfrm>
+          <a:prstGeom prst="line">
+            <a:avLst/>
+          </a:prstGeom>
+          <a:ln w="12700">
+            <a:solidFill>
+              <a:srgbClr val="66707F"/>
+            </a:solidFill>
+          </a:ln>
+          <a:effectLst/>
+        </p:spPr>
+        <p:style>
+          <a:lnRef idx="2">
+            <a:schemeClr val="accent1"/>
+          </a:lnRef>
+          <a:fillRef idx="0">
+            <a:schemeClr val="accent1"/>
+          </a:fillRef>
+          <a:effectRef idx="1">
+            <a:schemeClr val="accent1"/>
+          </a:effectRef>
+          <a:fontRef idx="minor">
+            <a:schemeClr val="tx1"/>
+          </a:fontRef>
+        </p:style>
+      </p:cxnSp>
+      <p:sp>
+        <p:nvSpPr>
+          <p:cNvPr id="39" name="TextBox 38"/>
+          <p:cNvSpPr txBox="1"/>
+          <p:nvPr/>
+        </p:nvSpPr>
+        <p:spPr>
+          <a:xfrm>
+            <a:off x="7188200" y="5867400"/>
+            <a:ext cx="1168400" cy="228600"/>
+          </a:xfrm>
+          <a:prstGeom prst="rect">
+            <a:avLst/>
+          </a:prstGeom>
+          <a:noFill/>
+        </p:spPr>
+        <p:txBody>
+          <a:bodyPr wrap="none" lIns="0" rIns="0" tIns="0" bIns="0">
+            <a:spAutoFit/>
+          </a:bodyPr>
+          <a:lstStyle/>
+          <a:p>
+            <a:pPr algn="ctr">
+              <a:lnSpc>
+                <a:spcPct val="130000"/>
+              </a:lnSpc>
+              <a:spcAft>
+                <a:spcPts val="0"/>
+              </a:spcAft>
+            </a:pPr>
+            <a:r>
+              <a:rPr sz="1000" b="1">
+                <a:solidFill>
+                  <a:srgbClr val="16233A"/>
+                </a:solidFill>
+                <a:latin typeface="游ゴシック"/>
+                <a:ea typeface="游ゴシック"/>
+              </a:rPr>
+              <a:t>最接近</a:t>
+            </a:r>
+          </a:p>
+        </p:txBody>
+      </p:sp>
+      <p:sp>
+        <p:nvSpPr>
+          <p:cNvPr id="40" name="TextBox 39"/>
+          <p:cNvSpPr txBox="1"/>
+          <p:nvPr/>
+        </p:nvSpPr>
+        <p:spPr>
+          <a:xfrm>
+            <a:off x="1752600" y="5867400"/>
+            <a:ext cx="1168400" cy="228600"/>
+          </a:xfrm>
+          <a:prstGeom prst="rect">
+            <a:avLst/>
+          </a:prstGeom>
+          <a:noFill/>
+        </p:spPr>
+        <p:txBody>
+          <a:bodyPr wrap="none" lIns="0" rIns="0" tIns="0" bIns="0">
+            <a:spAutoFit/>
+          </a:bodyPr>
+          <a:lstStyle/>
+          <a:p>
+            <a:pPr algn="ctr">
+              <a:lnSpc>
+                <a:spcPct val="130000"/>
+              </a:lnSpc>
+              <a:spcAft>
+                <a:spcPts val="0"/>
+              </a:spcAft>
+            </a:pPr>
+            <a:r>
+              <a:rPr sz="1000" b="0">
+                <a:solidFill>
+                  <a:srgbClr val="66707F"/>
+                </a:solidFill>
+                <a:latin typeface="游ゴシック"/>
+                <a:ea typeface="游ゴシック"/>
+              </a:rPr>
+              <a:t>1.5秒前</a:t>
+            </a:r>
+          </a:p>
+        </p:txBody>
+      </p:sp>
+      <p:sp>
+        <p:nvSpPr>
+          <p:cNvPr id="41" name="TextBox 40"/>
+          <p:cNvSpPr txBox="1"/>
+          <p:nvPr/>
+        </p:nvSpPr>
+        <p:spPr>
+          <a:xfrm>
+            <a:off x="762000" y="5410200"/>
+            <a:ext cx="1524000" cy="228600"/>
+          </a:xfrm>
+          <a:prstGeom prst="rect">
+            <a:avLst/>
+          </a:prstGeom>
+          <a:noFill/>
+        </p:spPr>
+        <p:txBody>
+          <a:bodyPr wrap="none" lIns="0" rIns="0" tIns="0" bIns="0">
+            <a:spAutoFit/>
+          </a:bodyPr>
+          <a:lstStyle/>
+          <a:p>
+            <a:pPr algn="l">
+              <a:lnSpc>
+                <a:spcPct val="130000"/>
+              </a:lnSpc>
+              <a:spcAft>
+                <a:spcPts val="0"/>
+              </a:spcAft>
+            </a:pPr>
+            <a:r>
+              <a:rPr sz="1150" b="1">
+                <a:solidFill>
+                  <a:srgbClr val="16233A"/>
+                </a:solidFill>
+                <a:latin typeface="游ゴシック"/>
+                <a:ea typeface="游ゴシック"/>
+              </a:rPr>
+              <a:t>いつ鳴るか</a:t>
+            </a:r>
+          </a:p>
+        </p:txBody>
+      </p:sp>
+      <p:sp>
+        <p:nvSpPr>
+          <p:cNvPr id="42" name="Oval 41"/>
+          <p:cNvSpPr/>
+          <p:nvPr/>
+        </p:nvSpPr>
+        <p:spPr>
+          <a:xfrm>
+            <a:off x="7696200" y="5511800"/>
+            <a:ext cx="152400" cy="152400"/>
+          </a:xfrm>
+          <a:prstGeom prst="ellipse">
+            <a:avLst/>
+          </a:prstGeom>
+          <a:solidFill>
+            <a:srgbClr val="C4432B"/>
+          </a:solidFill>
+          <a:ln>
+            <a:noFill/>
+          </a:ln>
+          <a:effectLst/>
+        </p:spPr>
+        <p:style>
+          <a:lnRef idx="1">
+            <a:schemeClr val="accent1"/>
+          </a:lnRef>
+          <a:fillRef idx="3">
+            <a:schemeClr val="accent1"/>
+          </a:fillRef>
+          <a:effectRef idx="2">
+            <a:schemeClr val="accent1"/>
+          </a:effectRef>
+          <a:fontRef idx="minor">
+            <a:schemeClr val="lt1"/>
+          </a:fontRef>
+        </p:style>
+        <p:txBody>
+          <a:bodyPr rtlCol="0" anchor="t" wrap="square" lIns="127000" rIns="127000" tIns="101600" bIns="101600"/>
+          <a:lstStyle/>
+          <a:p>
+            <a:pPr algn="ctr"/>
+          </a:p>
+        </p:txBody>
+      </p:sp>
+      <p:sp>
+        <p:nvSpPr>
+          <p:cNvPr id="43" name="TextBox 42"/>
+          <p:cNvSpPr txBox="1"/>
+          <p:nvPr/>
+        </p:nvSpPr>
+        <p:spPr>
+          <a:xfrm>
+            <a:off x="5232400" y="5435600"/>
+            <a:ext cx="2413000" cy="228600"/>
+          </a:xfrm>
+          <a:prstGeom prst="rect">
+            <a:avLst/>
+          </a:prstGeom>
+          <a:noFill/>
+        </p:spPr>
+        <p:txBody>
+          <a:bodyPr wrap="none" lIns="0" rIns="0" tIns="0" bIns="0">
+            <a:spAutoFit/>
+          </a:bodyPr>
+          <a:lstStyle/>
+          <a:p>
+            <a:pPr algn="r">
+              <a:lnSpc>
+                <a:spcPct val="130000"/>
+              </a:lnSpc>
+              <a:spcAft>
+                <a:spcPts val="0"/>
+              </a:spcAft>
+            </a:pPr>
+            <a:r>
+              <a:rPr sz="1100" b="1">
+                <a:solidFill>
+                  <a:srgbClr val="C4432B"/>
+                </a:solidFill>
+                <a:latin typeface="游ゴシック"/>
+                <a:ea typeface="游ゴシック"/>
+              </a:rPr>
+              <a:t>距離しきい値のみ ＝ 同時</a:t>
+            </a:r>
+          </a:p>
+        </p:txBody>
+      </p:sp>
+      <p:sp>
+        <p:nvSpPr>
+          <p:cNvPr id="44" name="Oval 43"/>
+          <p:cNvSpPr/>
+          <p:nvPr/>
+        </p:nvSpPr>
+        <p:spPr>
+          <a:xfrm>
+            <a:off x="4756573" y="5867400"/>
+            <a:ext cx="152400" cy="152400"/>
+          </a:xfrm>
+          <a:prstGeom prst="ellipse">
+            <a:avLst/>
+          </a:prstGeom>
+          <a:solidFill>
+            <a:srgbClr val="2F7D6D"/>
+          </a:solidFill>
+          <a:ln>
+            <a:noFill/>
+          </a:ln>
+          <a:effectLst/>
+        </p:spPr>
+        <p:style>
+          <a:lnRef idx="1">
+            <a:schemeClr val="accent1"/>
+          </a:lnRef>
+          <a:fillRef idx="3">
+            <a:schemeClr val="accent1"/>
+          </a:fillRef>
+          <a:effectRef idx="2">
+            <a:schemeClr val="accent1"/>
+          </a:effectRef>
+          <a:fontRef idx="minor">
+            <a:schemeClr val="lt1"/>
+          </a:fontRef>
+        </p:style>
+        <p:txBody>
+          <a:bodyPr rtlCol="0" anchor="t" wrap="square" lIns="127000" rIns="127000" tIns="101600" bIns="101600"/>
+          <a:lstStyle/>
+          <a:p>
+            <a:pPr algn="ctr"/>
+          </a:p>
+        </p:txBody>
+      </p:sp>
+      <p:sp>
+        <p:nvSpPr>
+          <p:cNvPr id="45" name="TextBox 44"/>
+          <p:cNvSpPr txBox="1"/>
+          <p:nvPr/>
+        </p:nvSpPr>
+        <p:spPr>
+          <a:xfrm>
+            <a:off x="2419773" y="6096000"/>
+            <a:ext cx="2362200" cy="228600"/>
+          </a:xfrm>
+          <a:prstGeom prst="rect">
+            <a:avLst/>
+          </a:prstGeom>
+          <a:noFill/>
+        </p:spPr>
+        <p:txBody>
+          <a:bodyPr wrap="none" lIns="0" rIns="0" tIns="0" bIns="0">
+            <a:spAutoFit/>
+          </a:bodyPr>
+          <a:lstStyle/>
+          <a:p>
+            <a:pPr algn="r">
+              <a:lnSpc>
+                <a:spcPct val="130000"/>
+              </a:lnSpc>
+              <a:spcAft>
+                <a:spcPts val="0"/>
+              </a:spcAft>
+            </a:pPr>
+            <a:r>
+              <a:rPr sz="1100" b="1">
+                <a:solidFill>
+                  <a:srgbClr val="2F7D6D"/>
+                </a:solidFill>
+                <a:latin typeface="游ゴシック"/>
+                <a:ea typeface="游ゴシック"/>
+              </a:rPr>
+              <a:t>最接近の予測 ＝ 0.80秒前</a:t>
+            </a:r>
+          </a:p>
+        </p:txBody>
+      </p:sp>
+      <p:sp>
+        <p:nvSpPr>
+          <p:cNvPr id="46" name="TextBox 45"/>
           <p:cNvSpPr txBox="1"/>
           <p:nvPr/>
         </p:nvSpPr>
